--- a/docs/software_testing_presentation.pptx
+++ b/docs/software_testing_presentation.pptx
@@ -2562,7 +2562,7 @@
           <a:p>
             <a:r>
               <a:rPr lang="en-US" dirty="0"/>
-              <a:t>Slide 5 illustrates the formal difference between errors, defects, and failures using the physical device login hang. It presents a native stacked column chart categorizing all 11 logged defects across the project lifecycle.</a:t>
+              <a:t>Slide 5 illustrates the formal difference between errors, defects, and failures using the physical device login hang. It presents a native stacked column chart categorizing all 13 logged defects across the project lifecycle.</a:t>
             </a:r>
             <a:endParaRPr lang="en-US" dirty="0"/>
           </a:p>
@@ -25199,7 +25199,7 @@
                 <a:ea typeface="Montserrat" pitchFamily="34" charset="-122"/>
                 <a:cs typeface="Montserrat" pitchFamily="34" charset="-120"/>
               </a:rPr>
-              <a:t>STATUS SUMMARY: 9 RESOLVED &amp; REGRESSION-TESTED | 2 HONESTLY OPEN</a:t>
+              <a:t>STATUS SUMMARY: 12 RESOLVED &amp; REGRESSION-TESTED | 1 HONESTLY OPEN</a:t>
             </a:r>
             <a:endParaRPr lang="en-US" sz="800" dirty="0"/>
           </a:p>
@@ -25216,7 +25216,7 @@
                 <a:ea typeface="Montserrat" pitchFamily="34" charset="-122"/>
                 <a:cs typeface="Montserrat" pitchFamily="34" charset="-120"/>
               </a:rPr>
-              <a:t>[DEF-008: 4-Week Calendar Skew (Open) | DEF-011: Legacy Donation State (Open)]</a:t>
+              <a:t>[DEF-013: Legacy Charity Donation State (Open Backlog)]</a:t>
             </a:r>
             <a:endParaRPr lang="en-US" sz="800" dirty="0"/>
           </a:p>
@@ -25286,7 +25286,7 @@
                 <a:ea typeface="Inter" pitchFamily="34" charset="-122"/>
                 <a:cs typeface="Inter" pitchFamily="34" charset="-120"/>
               </a:rPr>
-              <a:t>Empirical Defect Classification: Eleven verified defects logged across git history reveal primary defect clusters in layout rendering, mock data desynchronization, and network configuration.</a:t>
+              <a:t>Empirical Defect Classification: Thirteen verified defects logged across git history reveal primary defect clusters in layout rendering, security/cryptography, mock data desynchronization, and network configuration.</a:t>
             </a:r>
             <a:endParaRPr lang="en-US" sz="1150" dirty="0"/>
           </a:p>
@@ -25310,7 +25310,7 @@
                 <a:ea typeface="Inter" pitchFamily="34" charset="-122"/>
                 <a:cs typeface="Inter" pitchFamily="34" charset="-120"/>
               </a:rPr>
-              <a:t>Transparent Resolution Accounting: Nine defects are fully resolved with regression test coverage; two defects remain honestly documented as open (DEF-008 calendar lag alignment and DEF-011 legacy donation state).</a:t>
+              <a:t>Transparent Resolution Accounting: Twelve defects are fully resolved with regression test coverage; one defect remains honestly documented as open (DEF-013 legacy charity donation state).</a:t>
             </a:r>
             <a:endParaRPr lang="en-US" sz="1150" dirty="0"/>
           </a:p>
